--- a/inbox/Application Aware Networking/Book_04_FedAAN_HRIT_Identity_Org_SSOT.pptx
+++ b/inbox/Application Aware Networking/Book_04_FedAAN_HRIT_Identity_Org_SSOT.pptx
@@ -33,9 +33,10 @@
     <p:sldId id="281" r:id="rId27"/>
     <p:sldId id="282" r:id="rId28"/>
     <p:sldId id="283" r:id="rId29"/>
+    <p:sldId id="284" r:id="rId30"/>
   </p:sldIdLst>
   <p:notesMasterIdLst>
-    <p:notesMasterId r:id="rId30"/>
+    <p:notesMasterId r:id="rId31"/>
   </p:notesMasterIdLst>
   <p:sldSz cx="9144000" cy="5143500"/>
   <p:notesSz cx="5143500" cy="9144000"/>
@@ -2309,8 +2310,8 @@
           <a:p>
             <a:r>
               <a:rPr lang="en-US" dirty="0"/>
-              <a:t>Closing slide — the substrate in one line per plane, verbatim from the book: the naming plane knows what exists, the device plane knows what is connected, the cryptographic plane knows the claim is intact, and the HR plane knows the claim is true. And the doctrine paragraph: names are authoritative (Book 01), devices prove themselves at the wire (Book 02), every claim travels in a credential mathematics can verify (Book 03) — and this part supplies the one thing mathematics cannot: a true sentence to sign. The token asserts; the worker record is what makes the assertion true. After this part, the series stops building sources of truth, because there are none left to build. Everything after this point is modernization and evidence: Part 5 executes Principle 1 against the directory estate using this book's source; Part 7 inherits accounts whose lifecycle this book automates; Book 10 assumes the JML discipline as its floor; Book 19 packages the lifecycle evidence. The asks: sign the attribute authority map — Phase 1's gate; confirm data-quality ownership for the HCM feed (the honest caveat: designation does not create correctness); approve the shadow-mode pilot population; set the leaver-first automation date and the separation-to-revocation target the ConMon metric will be measured against; and align OU retirement with Part 5. All scoped to FedRAMP Moderate; the Date Code identifies this version, newest code wins.
-Vendor sources: https://csrc.nist.gov/pubs/sp/800/53/r5/upd1/final | uiao repo: inbox/Application Aware Networking/Book_04_FedAAN_HRIT_Identity_Org_SSOT.qmd</a:t>
+              <a:t>The federal compliance clock — added in the 2026-07-07 timeline pass; the fully-sourced version with the elapsed baseline lives in the Federal AAN / ConMon Gap Roadmap, the series' single source of truth for dates. Walk the rows: August 3 and 31, 2026 — FedRAMP 20x submission windows open, Class A first, then Class B and C, which is the GCC Moderate window (marketplace listings opened July 6; FedRAMP Ready went legacy July 28; temporary Rev5 conversion paths opened August 10). August 7, 2026 — BOD 26-04 (issued June 10, 2026) requires agency vulnerability-management policies to support risk-based remediation under its four-variable model: exposure, KEV listing, exploit automatability, and technical impact, with timelines from 3 days to deferral. September 21, 2026 — every FIPS 140-2 certificate moves to NIST's Historical List, ending new procurement reliance on 140-2-only validated modules; verify cryptographic modules are FIPS 140-3 tracked. December 7, 2026 — BOD 26-04's remediation timelines take force AND FedRAMP's Vulnerability Detection and Response / Vulnerability Evaluation and Reporting rules become mandatory: SBOM plus vendor disclosure. January 1, 2027 — the Consolidated Rules become mandatory for all FedRAMP systems, and CNSA 2.0's acquisition gate opens for National Security Systems (ML-KEM-1024, ML-DSA-87 — NSS-scoped, with the civilian trajectory following via M-23-02). June 11, 2027 — no new Rev5 certifications. Around August 2027 — the next scheduled NIST 800-53 release on the two-year cadence; note Release 5.2.0 (August 27, 2025) already added SA-15(13), SA-24, and SI-2(7), which are not yet mapped in the series' Parts 11/15 closure tables — a tracked action item. 2030/2035 — quantum-vulnerable cryptography is deprecated then prohibited; M-23-02's annual crypto inventories run to that horizon. The bottom bar reminds the audience of the mandates already in force: M-21-31 logging tiers, M-21-07 IPv6 targets, M-22-09 Zero Trust goals (past due but still measured, continued by M-24-14 and M-25-04), and BOD 25-01 SCuBA policies.
+Vendor sources: https://www.fedramp.gov/20x/ | https://www.cisa.gov/news-events/directives/bod-26-04-prioritizing-security-updates-based-risk | https://csrc.nist.gov/News/2025/nist-releases-revision-to-sp-800-53-controls | uiao repo: inbox/Application Aware Networking/federal-aan-conmon-gap-roadmap.md</a:t>
             </a:r>
             <a:endParaRPr lang="en-US" dirty="0"/>
           </a:p>
@@ -2334,6 +2335,95 @@
             <a:fld id="{F7021451-1387-4CA6-816F-3879F97B5CBC}" type="slidenum">
               <a:rPr lang="en-US"/>
               <a:t>28</a:t>
+            </a:fld>
+            <a:endParaRPr lang="en-US"/>
+          </a:p>
+        </p:txBody>
+      </p:sp>
+    </p:spTree>
+    <p:extLst>
+      <p:ext uri="{BB962C8B-B14F-4D97-AF65-F5344CB8AC3E}">
+        <p14:creationId xmlns:p14="http://schemas.microsoft.com/office/powerpoint/2010/main" val="1024086991"/>
+      </p:ext>
+    </p:extLst>
+  </p:cSld>
+  <p:clrMapOvr>
+    <a:masterClrMapping/>
+  </p:clrMapOvr>
+</p:notes>
+</file>
+
+<file path=ppt/notesSlides/notesSlide29.xml><?xml version="1.0" encoding="utf-8"?>
+<p:notes xmlns:a="http://schemas.openxmlformats.org/drawingml/2006/main" xmlns:r="http://schemas.openxmlformats.org/officeDocument/2006/relationships" xmlns:p="http://schemas.openxmlformats.org/presentationml/2006/main">
+  <p:cSld>
+    <p:spTree>
+      <p:nvGrpSpPr>
+        <p:cNvPr id="1" name=""/>
+        <p:cNvGrpSpPr/>
+        <p:nvPr/>
+      </p:nvGrpSpPr>
+      <p:grpSpPr>
+        <a:xfrm>
+          <a:off x="0" y="0"/>
+          <a:ext cx="0" cy="0"/>
+          <a:chOff x="0" y="0"/>
+          <a:chExt cx="0" cy="0"/>
+        </a:xfrm>
+      </p:grpSpPr>
+      <p:sp>
+        <p:nvSpPr>
+          <p:cNvPr id="2" name="Slide Image Placeholder 1"/>
+          <p:cNvSpPr>
+            <a:spLocks noGrp="1" noRot="1" noChangeAspect="1"/>
+          </p:cNvSpPr>
+          <p:nvPr>
+            <p:ph type="sldImg"/>
+          </p:nvPr>
+        </p:nvSpPr>
+        <p:spPr/>
+      </p:sp>
+      <p:sp>
+        <p:nvSpPr>
+          <p:cNvPr id="3" name="Notes Placeholder 2"/>
+          <p:cNvSpPr>
+            <a:spLocks noGrp="1"/>
+          </p:cNvSpPr>
+          <p:nvPr>
+            <p:ph type="body" idx="1"/>
+          </p:nvPr>
+        </p:nvSpPr>
+        <p:spPr/>
+        <p:txBody>
+          <a:bodyPr/>
+          <a:lstStyle/>
+          <a:p>
+            <a:r>
+              <a:rPr lang="en-US" dirty="0"/>
+              <a:t>Closing slide — the substrate in one line per plane, verbatim from the book: the naming plane knows what exists, the device plane knows what is connected, the cryptographic plane knows the claim is intact, and the HR plane knows the claim is true. And the doctrine paragraph: names are authoritative (Book 01), devices prove themselves at the wire (Book 02), every claim travels in a credential mathematics can verify (Book 03) — and this part supplies the one thing mathematics cannot: a true sentence to sign. The token asserts; the worker record is what makes the assertion true. After this part, the series stops building sources of truth, because there are none left to build. Everything after this point is modernization and evidence: Part 5 executes Principle 1 against the directory estate using this book's source; Part 7 inherits accounts whose lifecycle this book automates; Book 10 assumes the JML discipline as its floor; Book 19 packages the lifecycle evidence. The asks: sign the attribute authority map — Phase 1's gate; confirm data-quality ownership for the HCM feed (the honest caveat: designation does not create correctness); approve the shadow-mode pilot population; set the leaver-first automation date and the separation-to-revocation target the ConMon metric will be measured against; and align OU retirement with Part 5. All scoped to FedRAMP Moderate; the Date Code identifies this version, newest code wins.
+Vendor sources: https://csrc.nist.gov/pubs/sp/800/53/r5/upd1/final | uiao repo: inbox/Application Aware Networking/Book_04_FedAAN_HRIT_Identity_Org_SSOT.qmd</a:t>
+            </a:r>
+            <a:endParaRPr lang="en-US" dirty="0"/>
+          </a:p>
+        </p:txBody>
+      </p:sp>
+      <p:sp>
+        <p:nvSpPr>
+          <p:cNvPr id="4" name="Slide Number Placeholder 3"/>
+          <p:cNvSpPr>
+            <a:spLocks noGrp="1"/>
+          </p:cNvSpPr>
+          <p:nvPr>
+            <p:ph type="sldNum" sz="quarter" idx="10"/>
+          </p:nvPr>
+        </p:nvSpPr>
+        <p:spPr/>
+        <p:txBody>
+          <a:bodyPr/>
+          <a:lstStyle/>
+          <a:p>
+            <a:fld id="{F7021451-1387-4CA6-816F-3879F97B5CBC}" type="slidenum">
+              <a:rPr lang="en-US"/>
+              <a:t>29</a:t>
             </a:fld>
             <a:endParaRPr lang="en-US"/>
           </a:p>
@@ -3981,7 +4071,7 @@
                 <a:ea typeface="Arial" pitchFamily="34" charset="-122"/>
                 <a:cs typeface="Arial" pitchFamily="34" charset="-120"/>
               </a:rPr>
-              <a:t>Date Code: 2026-07-07 11:03 ET</a:t>
+              <a:t>Date Code: 2026-07-07 11:57 ET</a:t>
             </a:r>
             <a:endParaRPr lang="en-US" sz="1000" dirty="0"/>
           </a:p>
@@ -4196,7 +4286,7 @@
                 <a:ea typeface="Arial" pitchFamily="34" charset="-122"/>
                 <a:cs typeface="Arial" pitchFamily="34" charset="-120"/>
               </a:rPr>
-              <a:t>Federal AAN — Book 04 HRIT Identity &amp; Org SSOT · CSI Team Draft — Internal · FedRAMP Moderate · Date Code 2026-07-07 11:03 ET</a:t>
+              <a:t>Federal AAN — Book 04 HRIT Identity &amp; Org SSOT · CSI Team Draft — Internal · FedRAMP Moderate · Date Code 2026-07-07 11:57 ET</a:t>
             </a:r>
             <a:endParaRPr lang="en-US" sz="800" dirty="0"/>
           </a:p>
@@ -5016,7 +5106,7 @@
                 <a:ea typeface="Arial" pitchFamily="34" charset="-122"/>
                 <a:cs typeface="Arial" pitchFamily="34" charset="-120"/>
               </a:rPr>
-              <a:t>Federal AAN — Book 04 HRIT Identity &amp; Org SSOT · CSI Team Draft — Internal · FedRAMP Moderate · Date Code 2026-07-07 11:03 ET</a:t>
+              <a:t>Federal AAN — Book 04 HRIT Identity &amp; Org SSOT · CSI Team Draft — Internal · FedRAMP Moderate · Date Code 2026-07-07 11:57 ET</a:t>
             </a:r>
             <a:endParaRPr lang="en-US" sz="800" dirty="0"/>
           </a:p>
@@ -5836,7 +5926,7 @@
                 <a:ea typeface="Arial" pitchFamily="34" charset="-122"/>
                 <a:cs typeface="Arial" pitchFamily="34" charset="-120"/>
               </a:rPr>
-              <a:t>Federal AAN — Book 04 HRIT Identity &amp; Org SSOT · CSI Team Draft — Internal · FedRAMP Moderate · Date Code 2026-07-07 11:03 ET</a:t>
+              <a:t>Federal AAN — Book 04 HRIT Identity &amp; Org SSOT · CSI Team Draft — Internal · FedRAMP Moderate · Date Code 2026-07-07 11:57 ET</a:t>
             </a:r>
             <a:endParaRPr lang="en-US" sz="800" dirty="0"/>
           </a:p>
@@ -6656,7 +6746,7 @@
                 <a:ea typeface="Arial" pitchFamily="34" charset="-122"/>
                 <a:cs typeface="Arial" pitchFamily="34" charset="-120"/>
               </a:rPr>
-              <a:t>Federal AAN — Book 04 HRIT Identity &amp; Org SSOT · CSI Team Draft — Internal · FedRAMP Moderate · Date Code 2026-07-07 11:03 ET</a:t>
+              <a:t>Federal AAN — Book 04 HRIT Identity &amp; Org SSOT · CSI Team Draft — Internal · FedRAMP Moderate · Date Code 2026-07-07 11:57 ET</a:t>
             </a:r>
             <a:endParaRPr lang="en-US" sz="800" dirty="0"/>
           </a:p>
@@ -7698,7 +7788,7 @@
                 <a:ea typeface="Arial" pitchFamily="34" charset="-122"/>
                 <a:cs typeface="Arial" pitchFamily="34" charset="-120"/>
               </a:rPr>
-              <a:t>Federal AAN — Book 04 HRIT Identity &amp; Org SSOT · CSI Team Draft — Internal · FedRAMP Moderate · Date Code 2026-07-07 11:03 ET</a:t>
+              <a:t>Federal AAN — Book 04 HRIT Identity &amp; Org SSOT · CSI Team Draft — Internal · FedRAMP Moderate · Date Code 2026-07-07 11:57 ET</a:t>
             </a:r>
             <a:endParaRPr lang="en-US" sz="800" dirty="0"/>
           </a:p>
@@ -8393,7 +8483,7 @@
                 <a:ea typeface="Arial" pitchFamily="34" charset="-122"/>
                 <a:cs typeface="Arial" pitchFamily="34" charset="-120"/>
               </a:rPr>
-              <a:t>Federal AAN — Book 04 HRIT Identity &amp; Org SSOT · CSI Team Draft — Internal · FedRAMP Moderate · Date Code 2026-07-07 11:03 ET</a:t>
+              <a:t>Federal AAN — Book 04 HRIT Identity &amp; Org SSOT · CSI Team Draft — Internal · FedRAMP Moderate · Date Code 2026-07-07 11:57 ET</a:t>
             </a:r>
             <a:endParaRPr lang="en-US" sz="800" dirty="0"/>
           </a:p>
@@ -9183,7 +9273,7 @@
                 <a:ea typeface="Arial" pitchFamily="34" charset="-122"/>
                 <a:cs typeface="Arial" pitchFamily="34" charset="-120"/>
               </a:rPr>
-              <a:t>Federal AAN — Book 04 HRIT Identity &amp; Org SSOT · CSI Team Draft — Internal · FedRAMP Moderate · Date Code 2026-07-07 11:03 ET</a:t>
+              <a:t>Federal AAN — Book 04 HRIT Identity &amp; Org SSOT · CSI Team Draft — Internal · FedRAMP Moderate · Date Code 2026-07-07 11:57 ET</a:t>
             </a:r>
             <a:endParaRPr lang="en-US" sz="800" dirty="0"/>
           </a:p>
@@ -9853,7 +9943,7 @@
                 <a:ea typeface="Arial" pitchFamily="34" charset="-122"/>
                 <a:cs typeface="Arial" pitchFamily="34" charset="-120"/>
               </a:rPr>
-              <a:t>Federal AAN — Book 04 HRIT Identity &amp; Org SSOT · CSI Team Draft — Internal · FedRAMP Moderate · Date Code 2026-07-07 11:03 ET</a:t>
+              <a:t>Federal AAN — Book 04 HRIT Identity &amp; Org SSOT · CSI Team Draft — Internal · FedRAMP Moderate · Date Code 2026-07-07 11:57 ET</a:t>
             </a:r>
             <a:endParaRPr lang="en-US" sz="800" dirty="0"/>
           </a:p>
@@ -11594,7 +11684,7 @@
                 <a:ea typeface="Arial" pitchFamily="34" charset="-122"/>
                 <a:cs typeface="Arial" pitchFamily="34" charset="-120"/>
               </a:rPr>
-              <a:t>Federal AAN — Book 04 HRIT Identity &amp; Org SSOT · CSI Team Draft — Internal · FedRAMP Moderate · Date Code 2026-07-07 11:03 ET</a:t>
+              <a:t>Federal AAN — Book 04 HRIT Identity &amp; Org SSOT · CSI Team Draft — Internal · FedRAMP Moderate · Date Code 2026-07-07 11:57 ET</a:t>
             </a:r>
             <a:endParaRPr lang="en-US" sz="800" dirty="0"/>
           </a:p>
@@ -12184,7 +12274,7 @@
                 <a:ea typeface="Arial" pitchFamily="34" charset="-122"/>
                 <a:cs typeface="Arial" pitchFamily="34" charset="-120"/>
               </a:rPr>
-              <a:t>Federal AAN — Book 04 HRIT Identity &amp; Org SSOT · CSI Team Draft — Internal · FedRAMP Moderate · Date Code 2026-07-07 11:03 ET</a:t>
+              <a:t>Federal AAN — Book 04 HRIT Identity &amp; Org SSOT · CSI Team Draft — Internal · FedRAMP Moderate · Date Code 2026-07-07 11:57 ET</a:t>
             </a:r>
             <a:endParaRPr lang="en-US" sz="800" dirty="0"/>
           </a:p>
@@ -13544,7 +13634,7 @@
                 <a:ea typeface="Arial" pitchFamily="34" charset="-122"/>
                 <a:cs typeface="Arial" pitchFamily="34" charset="-120"/>
               </a:rPr>
-              <a:t>Federal AAN — Book 04 HRIT Identity &amp; Org SSOT · CSI Team Draft — Internal · FedRAMP Moderate · Date Code 2026-07-07 11:03 ET</a:t>
+              <a:t>Federal AAN — Book 04 HRIT Identity &amp; Org SSOT · CSI Team Draft — Internal · FedRAMP Moderate · Date Code 2026-07-07 11:57 ET</a:t>
             </a:r>
             <a:endParaRPr lang="en-US" sz="800" dirty="0"/>
           </a:p>
@@ -14504,7 +14594,7 @@
                 <a:ea typeface="Arial" pitchFamily="34" charset="-122"/>
                 <a:cs typeface="Arial" pitchFamily="34" charset="-120"/>
               </a:rPr>
-              <a:t>Federal AAN — Book 04 HRIT Identity &amp; Org SSOT · CSI Team Draft — Internal · FedRAMP Moderate · Date Code 2026-07-07 11:03 ET</a:t>
+              <a:t>Federal AAN — Book 04 HRIT Identity &amp; Org SSOT · CSI Team Draft — Internal · FedRAMP Moderate · Date Code 2026-07-07 11:57 ET</a:t>
             </a:r>
             <a:endParaRPr lang="en-US" sz="800" dirty="0"/>
           </a:p>
@@ -16039,7 +16129,7 @@
                 <a:ea typeface="Arial" pitchFamily="34" charset="-122"/>
                 <a:cs typeface="Arial" pitchFamily="34" charset="-120"/>
               </a:rPr>
-              <a:t>Federal AAN — Book 04 HRIT Identity &amp; Org SSOT · CSI Team Draft — Internal · FedRAMP Moderate · Date Code 2026-07-07 11:03 ET</a:t>
+              <a:t>Federal AAN — Book 04 HRIT Identity &amp; Org SSOT · CSI Team Draft — Internal · FedRAMP Moderate · Date Code 2026-07-07 11:57 ET</a:t>
             </a:r>
             <a:endParaRPr lang="en-US" sz="800" dirty="0"/>
           </a:p>
@@ -16628,7 +16718,7 @@
                 <a:ea typeface="Arial" pitchFamily="34" charset="-122"/>
                 <a:cs typeface="Arial" pitchFamily="34" charset="-120"/>
               </a:rPr>
-              <a:t>Federal AAN — Book 04 HRIT Identity &amp; Org SSOT · CSI Team Draft — Internal · FedRAMP Moderate · Date Code 2026-07-07 11:03 ET</a:t>
+              <a:t>Federal AAN — Book 04 HRIT Identity &amp; Org SSOT · CSI Team Draft — Internal · FedRAMP Moderate · Date Code 2026-07-07 11:57 ET</a:t>
             </a:r>
             <a:endParaRPr lang="en-US" sz="800" dirty="0"/>
           </a:p>
@@ -17526,7 +17616,7 @@
                 <a:ea typeface="Arial" pitchFamily="34" charset="-122"/>
                 <a:cs typeface="Arial" pitchFamily="34" charset="-120"/>
               </a:rPr>
-              <a:t>Federal AAN — Book 04 HRIT Identity &amp; Org SSOT · CSI Team Draft — Internal · FedRAMP Moderate · Date Code 2026-07-07 11:03 ET</a:t>
+              <a:t>Federal AAN — Book 04 HRIT Identity &amp; Org SSOT · CSI Team Draft — Internal · FedRAMP Moderate · Date Code 2026-07-07 11:57 ET</a:t>
             </a:r>
             <a:endParaRPr lang="en-US" sz="800" dirty="0"/>
           </a:p>
@@ -19470,7 +19560,7 @@
                 <a:ea typeface="Arial" pitchFamily="34" charset="-122"/>
                 <a:cs typeface="Arial" pitchFamily="34" charset="-120"/>
               </a:rPr>
-              <a:t>Federal AAN — Book 04 HRIT Identity &amp; Org SSOT · CSI Team Draft — Internal · FedRAMP Moderate · Date Code 2026-07-07 11:03 ET</a:t>
+              <a:t>Federal AAN — Book 04 HRIT Identity &amp; Org SSOT · CSI Team Draft — Internal · FedRAMP Moderate · Date Code 2026-07-07 11:57 ET</a:t>
             </a:r>
             <a:endParaRPr lang="en-US" sz="800" dirty="0"/>
           </a:p>
@@ -20734,7 +20824,7 @@
                 <a:ea typeface="Arial" pitchFamily="34" charset="-122"/>
                 <a:cs typeface="Arial" pitchFamily="34" charset="-120"/>
               </a:rPr>
-              <a:t>Federal AAN — Book 04 HRIT Identity &amp; Org SSOT · CSI Team Draft — Internal · FedRAMP Moderate · Date Code 2026-07-07 11:03 ET</a:t>
+              <a:t>Federal AAN — Book 04 HRIT Identity &amp; Org SSOT · CSI Team Draft — Internal · FedRAMP Moderate · Date Code 2026-07-07 11:57 ET</a:t>
             </a:r>
             <a:endParaRPr lang="en-US" sz="800" dirty="0"/>
           </a:p>
@@ -22020,7 +22110,7 @@
                 <a:ea typeface="Arial" pitchFamily="34" charset="-122"/>
                 <a:cs typeface="Arial" pitchFamily="34" charset="-120"/>
               </a:rPr>
-              <a:t>Federal AAN — Book 04 HRIT Identity &amp; Org SSOT · CSI Team Draft — Internal · FedRAMP Moderate · Date Code 2026-07-07 11:03 ET</a:t>
+              <a:t>Federal AAN — Book 04 HRIT Identity &amp; Org SSOT · CSI Team Draft — Internal · FedRAMP Moderate · Date Code 2026-07-07 11:57 ET</a:t>
             </a:r>
             <a:endParaRPr lang="en-US" sz="800" dirty="0"/>
           </a:p>
@@ -23320,7 +23410,7 @@
                 <a:ea typeface="Arial" pitchFamily="34" charset="-122"/>
                 <a:cs typeface="Arial" pitchFamily="34" charset="-120"/>
               </a:rPr>
-              <a:t>Federal AAN — Book 04 HRIT Identity &amp; Org SSOT · CSI Team Draft — Internal · FedRAMP Moderate · Date Code 2026-07-07 11:03 ET</a:t>
+              <a:t>Federal AAN — Book 04 HRIT Identity &amp; Org SSOT · CSI Team Draft — Internal · FedRAMP Moderate · Date Code 2026-07-07 11:57 ET</a:t>
             </a:r>
             <a:endParaRPr lang="en-US" sz="800" dirty="0"/>
           </a:p>
@@ -24086,7 +24176,7 @@
                 <a:ea typeface="Arial" pitchFamily="34" charset="-122"/>
                 <a:cs typeface="Arial" pitchFamily="34" charset="-120"/>
               </a:rPr>
-              <a:t>WHERE THIS LEAVES US</a:t>
+              <a:t>THE FEDERAL COMPLIANCE CLOCK</a:t>
             </a:r>
             <a:endParaRPr lang="en-US" sz="1100" dirty="0"/>
           </a:p>
@@ -24117,7 +24207,7 @@
               <a:buNone/>
             </a:pPr>
             <a:r>
-              <a:rPr lang="en-US" sz="2600" b="1" dirty="0">
+              <a:rPr lang="en-US" sz="2400" b="1" dirty="0">
                 <a:solidFill>
                   <a:srgbClr val="1F3A5F"/>
                 </a:solidFill>
@@ -24125,9 +24215,9 @@
                 <a:ea typeface="Arial" pitchFamily="34" charset="-122"/>
                 <a:cs typeface="Arial" pitchFamily="34" charset="-120"/>
               </a:rPr>
-              <a:t>The substrate is complete: four planes, four books</a:t>
-            </a:r>
-            <a:endParaRPr lang="en-US" sz="2600" dirty="0"/>
+              <a:t>Every deadline running against these controls</a:t>
+            </a:r>
+            <a:endParaRPr lang="en-US" sz="2400" dirty="0"/>
           </a:p>
         </p:txBody>
       </p:sp>
@@ -24164,7 +24254,7 @@
                 <a:ea typeface="Arial" pitchFamily="34" charset="-122"/>
                 <a:cs typeface="Arial" pitchFamily="34" charset="-120"/>
               </a:rPr>
-              <a:t>Federal AAN — Book 04 HRIT Identity &amp; Org SSOT · CSI Team Draft — Internal · FedRAMP Moderate · Date Code 2026-07-07 11:03 ET</a:t>
+              <a:t>Federal AAN — Book 04 HRIT Identity &amp; Org SSOT · CSI Team Draft — Internal · FedRAMP Moderate · Date Code 2026-07-07 11:57 ET</a:t>
             </a:r>
             <a:endParaRPr lang="en-US" sz="800" dirty="0"/>
           </a:p>
@@ -24204,6 +24294,1005 @@
                 <a:cs typeface="Arial" pitchFamily="34" charset="-120"/>
               </a:rPr>
               <a:t>28</a:t>
+            </a:r>
+            <a:endParaRPr lang="en-US" sz="800" dirty="0"/>
+          </a:p>
+        </p:txBody>
+      </p:sp>
+      <p:sp>
+        <p:nvSpPr>
+          <p:cNvPr id="6" name="Shape 4"/>
+          <p:cNvSpPr/>
+          <p:nvPr/>
+        </p:nvSpPr>
+        <p:spPr>
+          <a:xfrm>
+            <a:off x="658368" y="1271016"/>
+            <a:ext cx="118872" cy="118872"/>
+          </a:xfrm>
+          <a:prstGeom prst="ellipse">
+            <a:avLst/>
+          </a:prstGeom>
+          <a:solidFill>
+            <a:srgbClr val="1A9E8F"/>
+          </a:solidFill>
+          <a:ln/>
+        </p:spPr>
+      </p:sp>
+      <p:sp>
+        <p:nvSpPr>
+          <p:cNvPr id="7" name="Text 5"/>
+          <p:cNvSpPr/>
+          <p:nvPr/>
+        </p:nvSpPr>
+        <p:spPr>
+          <a:xfrm>
+            <a:off x="896112" y="1225296"/>
+            <a:ext cx="7818120" cy="365760"/>
+          </a:xfrm>
+          <a:prstGeom prst="rect">
+            <a:avLst/>
+          </a:prstGeom>
+          <a:noFill/>
+          <a:ln/>
+        </p:spPr>
+        <p:txBody>
+          <a:bodyPr wrap="square" lIns="0" tIns="0" rIns="0" bIns="0" rtlCol="0" anchor="t"/>
+          <a:lstStyle/>
+          <a:p>
+            <a:pPr indent="0" marL="0">
+              <a:buNone/>
+            </a:pPr>
+            <a:r>
+              <a:rPr lang="en-US" sz="1000" b="1" dirty="0">
+                <a:solidFill>
+                  <a:srgbClr val="1A9E8F"/>
+                </a:solidFill>
+                <a:latin typeface="Arial" pitchFamily="34" charset="0"/>
+                <a:ea typeface="Arial" pitchFamily="34" charset="-122"/>
+                <a:cs typeface="Arial" pitchFamily="34" charset="-120"/>
+              </a:rPr>
+              <a:t>Aug 3 / 31, 2026  </a:t>
+            </a:r>
+            <a:pPr indent="0" marL="0">
+              <a:buNone/>
+            </a:pPr>
+            <a:r>
+              <a:rPr lang="en-US" sz="950" dirty="0">
+                <a:solidFill>
+                  <a:srgbClr val="1E293B"/>
+                </a:solidFill>
+                <a:latin typeface="Arial" pitchFamily="34" charset="0"/>
+                <a:ea typeface="Arial" pitchFamily="34" charset="-122"/>
+                <a:cs typeface="Arial" pitchFamily="34" charset="-120"/>
+              </a:rPr>
+              <a:t>FedRAMP 20x opens — Class A, then Class B + C: the GCC Moderate window</a:t>
+            </a:r>
+            <a:endParaRPr lang="en-US" sz="1000" dirty="0"/>
+          </a:p>
+        </p:txBody>
+      </p:sp>
+      <p:sp>
+        <p:nvSpPr>
+          <p:cNvPr id="8" name="Shape 6"/>
+          <p:cNvSpPr/>
+          <p:nvPr/>
+        </p:nvSpPr>
+        <p:spPr>
+          <a:xfrm>
+            <a:off x="713232" y="1408176"/>
+            <a:ext cx="0" cy="256032"/>
+          </a:xfrm>
+          <a:prstGeom prst="line">
+            <a:avLst/>
+          </a:prstGeom>
+          <a:noFill/>
+          <a:ln w="19050">
+            <a:solidFill>
+              <a:srgbClr val="C9D4E0"/>
+            </a:solidFill>
+            <a:prstDash val="solid"/>
+          </a:ln>
+        </p:spPr>
+      </p:sp>
+      <p:sp>
+        <p:nvSpPr>
+          <p:cNvPr id="9" name="Shape 7"/>
+          <p:cNvSpPr/>
+          <p:nvPr/>
+        </p:nvSpPr>
+        <p:spPr>
+          <a:xfrm>
+            <a:off x="658368" y="1673352"/>
+            <a:ext cx="118872" cy="118872"/>
+          </a:xfrm>
+          <a:prstGeom prst="ellipse">
+            <a:avLst/>
+          </a:prstGeom>
+          <a:solidFill>
+            <a:srgbClr val="D4860B"/>
+          </a:solidFill>
+          <a:ln/>
+        </p:spPr>
+      </p:sp>
+      <p:sp>
+        <p:nvSpPr>
+          <p:cNvPr id="10" name="Text 8"/>
+          <p:cNvSpPr/>
+          <p:nvPr/>
+        </p:nvSpPr>
+        <p:spPr>
+          <a:xfrm>
+            <a:off x="896112" y="1627632"/>
+            <a:ext cx="7818120" cy="365760"/>
+          </a:xfrm>
+          <a:prstGeom prst="rect">
+            <a:avLst/>
+          </a:prstGeom>
+          <a:noFill/>
+          <a:ln/>
+        </p:spPr>
+        <p:txBody>
+          <a:bodyPr wrap="square" lIns="0" tIns="0" rIns="0" bIns="0" rtlCol="0" anchor="t"/>
+          <a:lstStyle/>
+          <a:p>
+            <a:pPr indent="0" marL="0">
+              <a:buNone/>
+            </a:pPr>
+            <a:r>
+              <a:rPr lang="en-US" sz="1000" b="1" dirty="0">
+                <a:solidFill>
+                  <a:srgbClr val="D4860B"/>
+                </a:solidFill>
+                <a:latin typeface="Arial" pitchFamily="34" charset="0"/>
+                <a:ea typeface="Arial" pitchFamily="34" charset="-122"/>
+                <a:cs typeface="Arial" pitchFamily="34" charset="-120"/>
+              </a:rPr>
+              <a:t>Aug 7, 2026  </a:t>
+            </a:r>
+            <a:pPr indent="0" marL="0">
+              <a:buNone/>
+            </a:pPr>
+            <a:r>
+              <a:rPr lang="en-US" sz="950" dirty="0">
+                <a:solidFill>
+                  <a:srgbClr val="1E293B"/>
+                </a:solidFill>
+                <a:latin typeface="Arial" pitchFamily="34" charset="0"/>
+                <a:ea typeface="Arial" pitchFamily="34" charset="-122"/>
+                <a:cs typeface="Arial" pitchFamily="34" charset="-120"/>
+              </a:rPr>
+              <a:t>BOD 26-04: agency vulnerability-management policies must support risk-based remediation</a:t>
+            </a:r>
+            <a:endParaRPr lang="en-US" sz="1000" dirty="0"/>
+          </a:p>
+        </p:txBody>
+      </p:sp>
+      <p:sp>
+        <p:nvSpPr>
+          <p:cNvPr id="11" name="Shape 9"/>
+          <p:cNvSpPr/>
+          <p:nvPr/>
+        </p:nvSpPr>
+        <p:spPr>
+          <a:xfrm>
+            <a:off x="713232" y="1810512"/>
+            <a:ext cx="0" cy="256032"/>
+          </a:xfrm>
+          <a:prstGeom prst="line">
+            <a:avLst/>
+          </a:prstGeom>
+          <a:noFill/>
+          <a:ln w="19050">
+            <a:solidFill>
+              <a:srgbClr val="C9D4E0"/>
+            </a:solidFill>
+            <a:prstDash val="solid"/>
+          </a:ln>
+        </p:spPr>
+      </p:sp>
+      <p:sp>
+        <p:nvSpPr>
+          <p:cNvPr id="12" name="Shape 10"/>
+          <p:cNvSpPr/>
+          <p:nvPr/>
+        </p:nvSpPr>
+        <p:spPr>
+          <a:xfrm>
+            <a:off x="658368" y="2075688"/>
+            <a:ext cx="118872" cy="118872"/>
+          </a:xfrm>
+          <a:prstGeom prst="ellipse">
+            <a:avLst/>
+          </a:prstGeom>
+          <a:solidFill>
+            <a:srgbClr val="C0392B"/>
+          </a:solidFill>
+          <a:ln/>
+        </p:spPr>
+      </p:sp>
+      <p:sp>
+        <p:nvSpPr>
+          <p:cNvPr id="13" name="Text 11"/>
+          <p:cNvSpPr/>
+          <p:nvPr/>
+        </p:nvSpPr>
+        <p:spPr>
+          <a:xfrm>
+            <a:off x="896112" y="2029968"/>
+            <a:ext cx="7818120" cy="365760"/>
+          </a:xfrm>
+          <a:prstGeom prst="rect">
+            <a:avLst/>
+          </a:prstGeom>
+          <a:noFill/>
+          <a:ln/>
+        </p:spPr>
+        <p:txBody>
+          <a:bodyPr wrap="square" lIns="0" tIns="0" rIns="0" bIns="0" rtlCol="0" anchor="t"/>
+          <a:lstStyle/>
+          <a:p>
+            <a:pPr indent="0" marL="0">
+              <a:buNone/>
+            </a:pPr>
+            <a:r>
+              <a:rPr lang="en-US" sz="1000" b="1" dirty="0">
+                <a:solidFill>
+                  <a:srgbClr val="C0392B"/>
+                </a:solidFill>
+                <a:latin typeface="Arial" pitchFamily="34" charset="0"/>
+                <a:ea typeface="Arial" pitchFamily="34" charset="-122"/>
+                <a:cs typeface="Arial" pitchFamily="34" charset="-120"/>
+              </a:rPr>
+              <a:t>Sep 21, 2026  </a:t>
+            </a:r>
+            <a:pPr indent="0" marL="0">
+              <a:buNone/>
+            </a:pPr>
+            <a:r>
+              <a:rPr lang="en-US" sz="950" dirty="0">
+                <a:solidFill>
+                  <a:srgbClr val="1E293B"/>
+                </a:solidFill>
+                <a:latin typeface="Arial" pitchFamily="34" charset="0"/>
+                <a:ea typeface="Arial" pitchFamily="34" charset="-122"/>
+                <a:cs typeface="Arial" pitchFamily="34" charset="-120"/>
+              </a:rPr>
+              <a:t>FIPS 140-2 certificates move to NIST's Historical List — verify FIPS 140-3 tracking (SC-13)</a:t>
+            </a:r>
+            <a:endParaRPr lang="en-US" sz="1000" dirty="0"/>
+          </a:p>
+        </p:txBody>
+      </p:sp>
+      <p:sp>
+        <p:nvSpPr>
+          <p:cNvPr id="14" name="Shape 12"/>
+          <p:cNvSpPr/>
+          <p:nvPr/>
+        </p:nvSpPr>
+        <p:spPr>
+          <a:xfrm>
+            <a:off x="713232" y="2212848"/>
+            <a:ext cx="0" cy="256032"/>
+          </a:xfrm>
+          <a:prstGeom prst="line">
+            <a:avLst/>
+          </a:prstGeom>
+          <a:noFill/>
+          <a:ln w="19050">
+            <a:solidFill>
+              <a:srgbClr val="C9D4E0"/>
+            </a:solidFill>
+            <a:prstDash val="solid"/>
+          </a:ln>
+        </p:spPr>
+      </p:sp>
+      <p:sp>
+        <p:nvSpPr>
+          <p:cNvPr id="15" name="Shape 13"/>
+          <p:cNvSpPr/>
+          <p:nvPr/>
+        </p:nvSpPr>
+        <p:spPr>
+          <a:xfrm>
+            <a:off x="658368" y="2478024"/>
+            <a:ext cx="118872" cy="118872"/>
+          </a:xfrm>
+          <a:prstGeom prst="ellipse">
+            <a:avLst/>
+          </a:prstGeom>
+          <a:solidFill>
+            <a:srgbClr val="C0392B"/>
+          </a:solidFill>
+          <a:ln/>
+        </p:spPr>
+      </p:sp>
+      <p:sp>
+        <p:nvSpPr>
+          <p:cNvPr id="16" name="Text 14"/>
+          <p:cNvSpPr/>
+          <p:nvPr/>
+        </p:nvSpPr>
+        <p:spPr>
+          <a:xfrm>
+            <a:off x="896112" y="2432304"/>
+            <a:ext cx="7818120" cy="365760"/>
+          </a:xfrm>
+          <a:prstGeom prst="rect">
+            <a:avLst/>
+          </a:prstGeom>
+          <a:noFill/>
+          <a:ln/>
+        </p:spPr>
+        <p:txBody>
+          <a:bodyPr wrap="square" lIns="0" tIns="0" rIns="0" bIns="0" rtlCol="0" anchor="t"/>
+          <a:lstStyle/>
+          <a:p>
+            <a:pPr indent="0" marL="0">
+              <a:buNone/>
+            </a:pPr>
+            <a:r>
+              <a:rPr lang="en-US" sz="1000" b="1" dirty="0">
+                <a:solidFill>
+                  <a:srgbClr val="C0392B"/>
+                </a:solidFill>
+                <a:latin typeface="Arial" pitchFamily="34" charset="0"/>
+                <a:ea typeface="Arial" pitchFamily="34" charset="-122"/>
+                <a:cs typeface="Arial" pitchFamily="34" charset="-120"/>
+              </a:rPr>
+              <a:t>Dec 7, 2026  </a:t>
+            </a:r>
+            <a:pPr indent="0" marL="0">
+              <a:buNone/>
+            </a:pPr>
+            <a:r>
+              <a:rPr lang="en-US" sz="950" dirty="0">
+                <a:solidFill>
+                  <a:srgbClr val="1E293B"/>
+                </a:solidFill>
+                <a:latin typeface="Arial" pitchFamily="34" charset="0"/>
+                <a:ea typeface="Arial" pitchFamily="34" charset="-122"/>
+                <a:cs typeface="Arial" pitchFamily="34" charset="-120"/>
+              </a:rPr>
+              <a:t>BOD 26-04 remediation timelines in force + FedRAMP VDR/VER mandatory (SBOM + vendor disclosure)</a:t>
+            </a:r>
+            <a:endParaRPr lang="en-US" sz="1000" dirty="0"/>
+          </a:p>
+        </p:txBody>
+      </p:sp>
+      <p:sp>
+        <p:nvSpPr>
+          <p:cNvPr id="17" name="Shape 15"/>
+          <p:cNvSpPr/>
+          <p:nvPr/>
+        </p:nvSpPr>
+        <p:spPr>
+          <a:xfrm>
+            <a:off x="713232" y="2615184"/>
+            <a:ext cx="0" cy="256032"/>
+          </a:xfrm>
+          <a:prstGeom prst="line">
+            <a:avLst/>
+          </a:prstGeom>
+          <a:noFill/>
+          <a:ln w="19050">
+            <a:solidFill>
+              <a:srgbClr val="C9D4E0"/>
+            </a:solidFill>
+            <a:prstDash val="solid"/>
+          </a:ln>
+        </p:spPr>
+      </p:sp>
+      <p:sp>
+        <p:nvSpPr>
+          <p:cNvPr id="18" name="Shape 16"/>
+          <p:cNvSpPr/>
+          <p:nvPr/>
+        </p:nvSpPr>
+        <p:spPr>
+          <a:xfrm>
+            <a:off x="658368" y="2880360"/>
+            <a:ext cx="118872" cy="118872"/>
+          </a:xfrm>
+          <a:prstGeom prst="ellipse">
+            <a:avLst/>
+          </a:prstGeom>
+          <a:solidFill>
+            <a:srgbClr val="1F3A5F"/>
+          </a:solidFill>
+          <a:ln/>
+        </p:spPr>
+      </p:sp>
+      <p:sp>
+        <p:nvSpPr>
+          <p:cNvPr id="19" name="Text 17"/>
+          <p:cNvSpPr/>
+          <p:nvPr/>
+        </p:nvSpPr>
+        <p:spPr>
+          <a:xfrm>
+            <a:off x="896112" y="2834640"/>
+            <a:ext cx="7818120" cy="365760"/>
+          </a:xfrm>
+          <a:prstGeom prst="rect">
+            <a:avLst/>
+          </a:prstGeom>
+          <a:noFill/>
+          <a:ln/>
+        </p:spPr>
+        <p:txBody>
+          <a:bodyPr wrap="square" lIns="0" tIns="0" rIns="0" bIns="0" rtlCol="0" anchor="t"/>
+          <a:lstStyle/>
+          <a:p>
+            <a:pPr indent="0" marL="0">
+              <a:buNone/>
+            </a:pPr>
+            <a:r>
+              <a:rPr lang="en-US" sz="1000" b="1" dirty="0">
+                <a:solidFill>
+                  <a:srgbClr val="1F3A5F"/>
+                </a:solidFill>
+                <a:latin typeface="Arial" pitchFamily="34" charset="0"/>
+                <a:ea typeface="Arial" pitchFamily="34" charset="-122"/>
+                <a:cs typeface="Arial" pitchFamily="34" charset="-120"/>
+              </a:rPr>
+              <a:t>Jan 1, 2027  </a:t>
+            </a:r>
+            <a:pPr indent="0" marL="0">
+              <a:buNone/>
+            </a:pPr>
+            <a:r>
+              <a:rPr lang="en-US" sz="950" dirty="0">
+                <a:solidFill>
+                  <a:srgbClr val="1E293B"/>
+                </a:solidFill>
+                <a:latin typeface="Arial" pitchFamily="34" charset="0"/>
+                <a:ea typeface="Arial" pitchFamily="34" charset="-122"/>
+                <a:cs typeface="Arial" pitchFamily="34" charset="-120"/>
+              </a:rPr>
+              <a:t>FedRAMP CR26 mandatory for all · CNSA 2.0 acquisition gate (NSS-scoped; civilian PQC follows)</a:t>
+            </a:r>
+            <a:endParaRPr lang="en-US" sz="1000" dirty="0"/>
+          </a:p>
+        </p:txBody>
+      </p:sp>
+      <p:sp>
+        <p:nvSpPr>
+          <p:cNvPr id="20" name="Shape 18"/>
+          <p:cNvSpPr/>
+          <p:nvPr/>
+        </p:nvSpPr>
+        <p:spPr>
+          <a:xfrm>
+            <a:off x="713232" y="3017520"/>
+            <a:ext cx="0" cy="256032"/>
+          </a:xfrm>
+          <a:prstGeom prst="line">
+            <a:avLst/>
+          </a:prstGeom>
+          <a:noFill/>
+          <a:ln w="19050">
+            <a:solidFill>
+              <a:srgbClr val="C9D4E0"/>
+            </a:solidFill>
+            <a:prstDash val="solid"/>
+          </a:ln>
+        </p:spPr>
+      </p:sp>
+      <p:sp>
+        <p:nvSpPr>
+          <p:cNvPr id="21" name="Shape 19"/>
+          <p:cNvSpPr/>
+          <p:nvPr/>
+        </p:nvSpPr>
+        <p:spPr>
+          <a:xfrm>
+            <a:off x="658368" y="3282696"/>
+            <a:ext cx="118872" cy="118872"/>
+          </a:xfrm>
+          <a:prstGeom prst="ellipse">
+            <a:avLst/>
+          </a:prstGeom>
+          <a:solidFill>
+            <a:srgbClr val="1F3A5F"/>
+          </a:solidFill>
+          <a:ln/>
+        </p:spPr>
+      </p:sp>
+      <p:sp>
+        <p:nvSpPr>
+          <p:cNvPr id="22" name="Text 20"/>
+          <p:cNvSpPr/>
+          <p:nvPr/>
+        </p:nvSpPr>
+        <p:spPr>
+          <a:xfrm>
+            <a:off x="896112" y="3236976"/>
+            <a:ext cx="7818120" cy="365760"/>
+          </a:xfrm>
+          <a:prstGeom prst="rect">
+            <a:avLst/>
+          </a:prstGeom>
+          <a:noFill/>
+          <a:ln/>
+        </p:spPr>
+        <p:txBody>
+          <a:bodyPr wrap="square" lIns="0" tIns="0" rIns="0" bIns="0" rtlCol="0" anchor="t"/>
+          <a:lstStyle/>
+          <a:p>
+            <a:pPr indent="0" marL="0">
+              <a:buNone/>
+            </a:pPr>
+            <a:r>
+              <a:rPr lang="en-US" sz="1000" b="1" dirty="0">
+                <a:solidFill>
+                  <a:srgbClr val="1F3A5F"/>
+                </a:solidFill>
+                <a:latin typeface="Arial" pitchFamily="34" charset="0"/>
+                <a:ea typeface="Arial" pitchFamily="34" charset="-122"/>
+                <a:cs typeface="Arial" pitchFamily="34" charset="-120"/>
+              </a:rPr>
+              <a:t>Jun 11, 2027  </a:t>
+            </a:r>
+            <a:pPr indent="0" marL="0">
+              <a:buNone/>
+            </a:pPr>
+            <a:r>
+              <a:rPr lang="en-US" sz="950" dirty="0">
+                <a:solidFill>
+                  <a:srgbClr val="1E293B"/>
+                </a:solidFill>
+                <a:latin typeface="Arial" pitchFamily="34" charset="0"/>
+                <a:ea typeface="Arial" pitchFamily="34" charset="-122"/>
+                <a:cs typeface="Arial" pitchFamily="34" charset="-120"/>
+              </a:rPr>
+              <a:t>No new Rev5 certifications accepted</a:t>
+            </a:r>
+            <a:endParaRPr lang="en-US" sz="1000" dirty="0"/>
+          </a:p>
+        </p:txBody>
+      </p:sp>
+      <p:sp>
+        <p:nvSpPr>
+          <p:cNvPr id="23" name="Shape 21"/>
+          <p:cNvSpPr/>
+          <p:nvPr/>
+        </p:nvSpPr>
+        <p:spPr>
+          <a:xfrm>
+            <a:off x="713232" y="3419856"/>
+            <a:ext cx="0" cy="256032"/>
+          </a:xfrm>
+          <a:prstGeom prst="line">
+            <a:avLst/>
+          </a:prstGeom>
+          <a:noFill/>
+          <a:ln w="19050">
+            <a:solidFill>
+              <a:srgbClr val="C9D4E0"/>
+            </a:solidFill>
+            <a:prstDash val="solid"/>
+          </a:ln>
+        </p:spPr>
+      </p:sp>
+      <p:sp>
+        <p:nvSpPr>
+          <p:cNvPr id="24" name="Shape 22"/>
+          <p:cNvSpPr/>
+          <p:nvPr/>
+        </p:nvSpPr>
+        <p:spPr>
+          <a:xfrm>
+            <a:off x="658368" y="3685032"/>
+            <a:ext cx="118872" cy="118872"/>
+          </a:xfrm>
+          <a:prstGeom prst="ellipse">
+            <a:avLst/>
+          </a:prstGeom>
+          <a:solidFill>
+            <a:srgbClr val="D4860B"/>
+          </a:solidFill>
+          <a:ln/>
+        </p:spPr>
+      </p:sp>
+      <p:sp>
+        <p:nvSpPr>
+          <p:cNvPr id="25" name="Text 23"/>
+          <p:cNvSpPr/>
+          <p:nvPr/>
+        </p:nvSpPr>
+        <p:spPr>
+          <a:xfrm>
+            <a:off x="896112" y="3639312"/>
+            <a:ext cx="7818120" cy="365760"/>
+          </a:xfrm>
+          <a:prstGeom prst="rect">
+            <a:avLst/>
+          </a:prstGeom>
+          <a:noFill/>
+          <a:ln/>
+        </p:spPr>
+        <p:txBody>
+          <a:bodyPr wrap="square" lIns="0" tIns="0" rIns="0" bIns="0" rtlCol="0" anchor="t"/>
+          <a:lstStyle/>
+          <a:p>
+            <a:pPr indent="0" marL="0">
+              <a:buNone/>
+            </a:pPr>
+            <a:r>
+              <a:rPr lang="en-US" sz="1000" b="1" dirty="0">
+                <a:solidFill>
+                  <a:srgbClr val="D4860B"/>
+                </a:solidFill>
+                <a:latin typeface="Arial" pitchFamily="34" charset="0"/>
+                <a:ea typeface="Arial" pitchFamily="34" charset="-122"/>
+                <a:cs typeface="Arial" pitchFamily="34" charset="-120"/>
+              </a:rPr>
+              <a:t>~Aug 2027  </a:t>
+            </a:r>
+            <a:pPr indent="0" marL="0">
+              <a:buNone/>
+            </a:pPr>
+            <a:r>
+              <a:rPr lang="en-US" sz="950" dirty="0">
+                <a:solidFill>
+                  <a:srgbClr val="1E293B"/>
+                </a:solidFill>
+                <a:latin typeface="Arial" pitchFamily="34" charset="0"/>
+                <a:ea typeface="Arial" pitchFamily="34" charset="-122"/>
+                <a:cs typeface="Arial" pitchFamily="34" charset="-120"/>
+              </a:rPr>
+              <a:t>Next scheduled NIST 800-53 release — 5.2.0 (Aug 2025) already added SA-15(13), SA-24, SI-2(7)</a:t>
+            </a:r>
+            <a:endParaRPr lang="en-US" sz="1000" dirty="0"/>
+          </a:p>
+        </p:txBody>
+      </p:sp>
+      <p:sp>
+        <p:nvSpPr>
+          <p:cNvPr id="26" name="Shape 24"/>
+          <p:cNvSpPr/>
+          <p:nvPr/>
+        </p:nvSpPr>
+        <p:spPr>
+          <a:xfrm>
+            <a:off x="713232" y="3822192"/>
+            <a:ext cx="0" cy="256032"/>
+          </a:xfrm>
+          <a:prstGeom prst="line">
+            <a:avLst/>
+          </a:prstGeom>
+          <a:noFill/>
+          <a:ln w="19050">
+            <a:solidFill>
+              <a:srgbClr val="C9D4E0"/>
+            </a:solidFill>
+            <a:prstDash val="solid"/>
+          </a:ln>
+        </p:spPr>
+      </p:sp>
+      <p:sp>
+        <p:nvSpPr>
+          <p:cNvPr id="27" name="Shape 25"/>
+          <p:cNvSpPr/>
+          <p:nvPr/>
+        </p:nvSpPr>
+        <p:spPr>
+          <a:xfrm>
+            <a:off x="658368" y="4087368"/>
+            <a:ext cx="118872" cy="118872"/>
+          </a:xfrm>
+          <a:prstGeom prst="ellipse">
+            <a:avLst/>
+          </a:prstGeom>
+          <a:solidFill>
+            <a:srgbClr val="5B6B7C"/>
+          </a:solidFill>
+          <a:ln/>
+        </p:spPr>
+      </p:sp>
+      <p:sp>
+        <p:nvSpPr>
+          <p:cNvPr id="28" name="Text 26"/>
+          <p:cNvSpPr/>
+          <p:nvPr/>
+        </p:nvSpPr>
+        <p:spPr>
+          <a:xfrm>
+            <a:off x="896112" y="4041648"/>
+            <a:ext cx="7818120" cy="365760"/>
+          </a:xfrm>
+          <a:prstGeom prst="rect">
+            <a:avLst/>
+          </a:prstGeom>
+          <a:noFill/>
+          <a:ln/>
+        </p:spPr>
+        <p:txBody>
+          <a:bodyPr wrap="square" lIns="0" tIns="0" rIns="0" bIns="0" rtlCol="0" anchor="t"/>
+          <a:lstStyle/>
+          <a:p>
+            <a:pPr indent="0" marL="0">
+              <a:buNone/>
+            </a:pPr>
+            <a:r>
+              <a:rPr lang="en-US" sz="1000" b="1" dirty="0">
+                <a:solidFill>
+                  <a:srgbClr val="5B6B7C"/>
+                </a:solidFill>
+                <a:latin typeface="Arial" pitchFamily="34" charset="0"/>
+                <a:ea typeface="Arial" pitchFamily="34" charset="-122"/>
+                <a:cs typeface="Arial" pitchFamily="34" charset="-120"/>
+              </a:rPr>
+              <a:t>2030 / 2035  </a:t>
+            </a:r>
+            <a:pPr indent="0" marL="0">
+              <a:buNone/>
+            </a:pPr>
+            <a:r>
+              <a:rPr lang="en-US" sz="950" dirty="0">
+                <a:solidFill>
+                  <a:srgbClr val="1E293B"/>
+                </a:solidFill>
+                <a:latin typeface="Arial" pitchFamily="34" charset="0"/>
+                <a:ea typeface="Arial" pitchFamily="34" charset="-122"/>
+                <a:cs typeface="Arial" pitchFamily="34" charset="-120"/>
+              </a:rPr>
+              <a:t>Quantum-vulnerable cryptography deprecated, then prohibited — M-23-02 inventories run to the horizon</a:t>
+            </a:r>
+            <a:endParaRPr lang="en-US" sz="1000" dirty="0"/>
+          </a:p>
+        </p:txBody>
+      </p:sp>
+      <p:sp>
+        <p:nvSpPr>
+          <p:cNvPr id="29" name="Shape 27"/>
+          <p:cNvSpPr/>
+          <p:nvPr/>
+        </p:nvSpPr>
+        <p:spPr>
+          <a:xfrm>
+            <a:off x="502920" y="4462272"/>
+            <a:ext cx="8229600" cy="365760"/>
+          </a:xfrm>
+          <a:prstGeom prst="roundRect">
+            <a:avLst>
+              <a:gd name="adj" fmla="val 17500"/>
+            </a:avLst>
+          </a:prstGeom>
+          <a:solidFill>
+            <a:srgbClr val="EDF3F9"/>
+          </a:solidFill>
+          <a:ln w="9525">
+            <a:solidFill>
+              <a:srgbClr val="C9D4E0"/>
+            </a:solidFill>
+            <a:prstDash val="solid"/>
+          </a:ln>
+        </p:spPr>
+      </p:sp>
+      <p:sp>
+        <p:nvSpPr>
+          <p:cNvPr id="30" name="Text 28"/>
+          <p:cNvSpPr/>
+          <p:nvPr/>
+        </p:nvSpPr>
+        <p:spPr>
+          <a:xfrm>
+            <a:off x="731520" y="4462272"/>
+            <a:ext cx="7772400" cy="365760"/>
+          </a:xfrm>
+          <a:prstGeom prst="rect">
+            <a:avLst/>
+          </a:prstGeom>
+          <a:noFill/>
+          <a:ln/>
+        </p:spPr>
+        <p:txBody>
+          <a:bodyPr wrap="square" lIns="0" tIns="0" rIns="0" bIns="0" rtlCol="0" anchor="ctr"/>
+          <a:lstStyle/>
+          <a:p>
+            <a:pPr indent="0" marL="0">
+              <a:buNone/>
+            </a:pPr>
+            <a:r>
+              <a:rPr lang="en-US" sz="850" b="1" dirty="0">
+                <a:solidFill>
+                  <a:srgbClr val="1F3A5F"/>
+                </a:solidFill>
+                <a:latin typeface="Arial" pitchFamily="34" charset="0"/>
+                <a:ea typeface="Arial" pitchFamily="34" charset="-122"/>
+                <a:cs typeface="Arial" pitchFamily="34" charset="-120"/>
+              </a:rPr>
+              <a:t>SSOT for federal dates: the Federal AAN / ConMon Gap Roadmap (verified 2026-07-07). Already in force: M-21-31 logging, M-21-07 IPv6, M-22-09 Zero Trust (continued by M-24-14 / M-25-04), BOD 25-01 SCuBA.</a:t>
+            </a:r>
+            <a:endParaRPr lang="en-US" sz="850" dirty="0"/>
+          </a:p>
+        </p:txBody>
+      </p:sp>
+    </p:spTree>
+  </p:cSld>
+  <p:clrMapOvr>
+    <a:masterClrMapping/>
+  </p:clrMapOvr>
+</p:sld>
+</file>
+
+<file path=ppt/slides/slide29.xml><?xml version="1.0" encoding="utf-8"?>
+<p:sld xmlns:a="http://schemas.openxmlformats.org/drawingml/2006/main" xmlns:r="http://schemas.openxmlformats.org/officeDocument/2006/relationships" xmlns:p="http://schemas.openxmlformats.org/presentationml/2006/main">
+  <p:cSld name="Slide 29">
+    <p:bg>
+      <p:bgPr>
+        <a:solidFill>
+          <a:srgbClr val="FFFFFF"/>
+        </a:solidFill>
+      </p:bgPr>
+    </p:bg>
+    <p:spTree>
+      <p:nvGrpSpPr>
+        <p:cNvPr id="1" name=""/>
+        <p:cNvGrpSpPr/>
+        <p:nvPr/>
+      </p:nvGrpSpPr>
+      <p:grpSpPr>
+        <a:xfrm>
+          <a:off x="0" y="0"/>
+          <a:ext cx="0" cy="0"/>
+          <a:chOff x="0" y="0"/>
+          <a:chExt cx="0" cy="0"/>
+        </a:xfrm>
+      </p:grpSpPr>
+      <p:sp>
+        <p:nvSpPr>
+          <p:cNvPr id="2" name="Text 0"/>
+          <p:cNvSpPr/>
+          <p:nvPr/>
+        </p:nvSpPr>
+        <p:spPr>
+          <a:xfrm>
+            <a:off x="502920" y="256032"/>
+            <a:ext cx="8229600" cy="274320"/>
+          </a:xfrm>
+          <a:prstGeom prst="rect">
+            <a:avLst/>
+          </a:prstGeom>
+          <a:noFill/>
+          <a:ln/>
+        </p:spPr>
+        <p:txBody>
+          <a:bodyPr wrap="square" lIns="0" tIns="0" rIns="0" bIns="0" rtlCol="0" anchor="ctr"/>
+          <a:lstStyle/>
+          <a:p>
+            <a:pPr indent="0" marL="0">
+              <a:buNone/>
+            </a:pPr>
+            <a:r>
+              <a:rPr lang="en-US" sz="1100" b="1" spc="200" kern="0" dirty="0">
+                <a:solidFill>
+                  <a:srgbClr val="1A9E8F"/>
+                </a:solidFill>
+                <a:latin typeface="Arial" pitchFamily="34" charset="0"/>
+                <a:ea typeface="Arial" pitchFamily="34" charset="-122"/>
+                <a:cs typeface="Arial" pitchFamily="34" charset="-120"/>
+              </a:rPr>
+              <a:t>WHERE THIS LEAVES US</a:t>
+            </a:r>
+            <a:endParaRPr lang="en-US" sz="1100" dirty="0"/>
+          </a:p>
+        </p:txBody>
+      </p:sp>
+      <p:sp>
+        <p:nvSpPr>
+          <p:cNvPr id="3" name="Text 1"/>
+          <p:cNvSpPr/>
+          <p:nvPr/>
+        </p:nvSpPr>
+        <p:spPr>
+          <a:xfrm>
+            <a:off x="502920" y="512064"/>
+            <a:ext cx="8138160" cy="566928"/>
+          </a:xfrm>
+          <a:prstGeom prst="rect">
+            <a:avLst/>
+          </a:prstGeom>
+          <a:noFill/>
+          <a:ln/>
+        </p:spPr>
+        <p:txBody>
+          <a:bodyPr wrap="square" lIns="0" tIns="0" rIns="0" bIns="0" rtlCol="0" anchor="ctr"/>
+          <a:lstStyle/>
+          <a:p>
+            <a:pPr indent="0" marL="0">
+              <a:buNone/>
+            </a:pPr>
+            <a:r>
+              <a:rPr lang="en-US" sz="2600" b="1" dirty="0">
+                <a:solidFill>
+                  <a:srgbClr val="1F3A5F"/>
+                </a:solidFill>
+                <a:latin typeface="Arial" pitchFamily="34" charset="0"/>
+                <a:ea typeface="Arial" pitchFamily="34" charset="-122"/>
+                <a:cs typeface="Arial" pitchFamily="34" charset="-120"/>
+              </a:rPr>
+              <a:t>The substrate is complete: four planes, four books</a:t>
+            </a:r>
+            <a:endParaRPr lang="en-US" sz="2600" dirty="0"/>
+          </a:p>
+        </p:txBody>
+      </p:sp>
+      <p:sp>
+        <p:nvSpPr>
+          <p:cNvPr id="4" name="Text 2"/>
+          <p:cNvSpPr/>
+          <p:nvPr/>
+        </p:nvSpPr>
+        <p:spPr>
+          <a:xfrm>
+            <a:off x="502920" y="4864608"/>
+            <a:ext cx="7315200" cy="219456"/>
+          </a:xfrm>
+          <a:prstGeom prst="rect">
+            <a:avLst/>
+          </a:prstGeom>
+          <a:noFill/>
+          <a:ln/>
+        </p:spPr>
+        <p:txBody>
+          <a:bodyPr wrap="square" lIns="0" tIns="0" rIns="0" bIns="0" rtlCol="0" anchor="ctr"/>
+          <a:lstStyle/>
+          <a:p>
+            <a:pPr indent="0" marL="0">
+              <a:buNone/>
+            </a:pPr>
+            <a:r>
+              <a:rPr lang="en-US" sz="800" dirty="0">
+                <a:solidFill>
+                  <a:srgbClr val="5B6B7C"/>
+                </a:solidFill>
+                <a:latin typeface="Arial" pitchFamily="34" charset="0"/>
+                <a:ea typeface="Arial" pitchFamily="34" charset="-122"/>
+                <a:cs typeface="Arial" pitchFamily="34" charset="-120"/>
+              </a:rPr>
+              <a:t>Federal AAN — Book 04 HRIT Identity &amp; Org SSOT · CSI Team Draft — Internal · FedRAMP Moderate · Date Code 2026-07-07 11:57 ET</a:t>
+            </a:r>
+            <a:endParaRPr lang="en-US" sz="800" dirty="0"/>
+          </a:p>
+        </p:txBody>
+      </p:sp>
+      <p:sp>
+        <p:nvSpPr>
+          <p:cNvPr id="5" name="Text 3"/>
+          <p:cNvSpPr/>
+          <p:nvPr/>
+        </p:nvSpPr>
+        <p:spPr>
+          <a:xfrm>
+            <a:off x="8412480" y="4864608"/>
+            <a:ext cx="320040" cy="219456"/>
+          </a:xfrm>
+          <a:prstGeom prst="rect">
+            <a:avLst/>
+          </a:prstGeom>
+          <a:noFill/>
+          <a:ln/>
+        </p:spPr>
+        <p:txBody>
+          <a:bodyPr wrap="square" lIns="0" tIns="0" rIns="0" bIns="0" rtlCol="0" anchor="ctr"/>
+          <a:lstStyle/>
+          <a:p>
+            <a:pPr algn="r" indent="0" marL="0">
+              <a:buNone/>
+            </a:pPr>
+            <a:r>
+              <a:rPr lang="en-US" sz="800" dirty="0">
+                <a:solidFill>
+                  <a:srgbClr val="5B6B7C"/>
+                </a:solidFill>
+                <a:latin typeface="Arial" pitchFamily="34" charset="0"/>
+                <a:ea typeface="Arial" pitchFamily="34" charset="-122"/>
+                <a:cs typeface="Arial" pitchFamily="34" charset="-120"/>
+              </a:rPr>
+              <a:t>29</a:t>
             </a:r>
             <a:endParaRPr lang="en-US" sz="800" dirty="0"/>
           </a:p>
@@ -24839,7 +25928,7 @@
                 <a:ea typeface="Arial" pitchFamily="34" charset="-122"/>
                 <a:cs typeface="Arial" pitchFamily="34" charset="-120"/>
               </a:rPr>
-              <a:t>Federal AAN — Book 04 HRIT Identity &amp; Org SSOT · CSI Team Draft — Internal · FedRAMP Moderate · Date Code 2026-07-07 11:03 ET</a:t>
+              <a:t>Federal AAN — Book 04 HRIT Identity &amp; Org SSOT · CSI Team Draft — Internal · FedRAMP Moderate · Date Code 2026-07-07 11:57 ET</a:t>
             </a:r>
             <a:endParaRPr lang="en-US" sz="800" dirty="0"/>
           </a:p>
@@ -25635,7 +26724,7 @@
                 <a:ea typeface="Arial" pitchFamily="34" charset="-122"/>
                 <a:cs typeface="Arial" pitchFamily="34" charset="-120"/>
               </a:rPr>
-              <a:t>Federal AAN — Book 04 HRIT Identity &amp; Org SSOT · CSI Team Draft — Internal · FedRAMP Moderate · Date Code 2026-07-07 11:03 ET</a:t>
+              <a:t>Federal AAN — Book 04 HRIT Identity &amp; Org SSOT · CSI Team Draft — Internal · FedRAMP Moderate · Date Code 2026-07-07 11:57 ET</a:t>
             </a:r>
             <a:endParaRPr lang="en-US" sz="800" dirty="0"/>
           </a:p>
@@ -27579,7 +28668,7 @@
                 <a:ea typeface="Arial" pitchFamily="34" charset="-122"/>
                 <a:cs typeface="Arial" pitchFamily="34" charset="-120"/>
               </a:rPr>
-              <a:t>Federal AAN — Book 04 HRIT Identity &amp; Org SSOT · CSI Team Draft — Internal · FedRAMP Moderate · Date Code 2026-07-07 11:03 ET</a:t>
+              <a:t>Federal AAN — Book 04 HRIT Identity &amp; Org SSOT · CSI Team Draft — Internal · FedRAMP Moderate · Date Code 2026-07-07 11:57 ET</a:t>
             </a:r>
             <a:endParaRPr lang="en-US" sz="800" dirty="0"/>
           </a:p>
@@ -28249,7 +29338,7 @@
                 <a:ea typeface="Arial" pitchFamily="34" charset="-122"/>
                 <a:cs typeface="Arial" pitchFamily="34" charset="-120"/>
               </a:rPr>
-              <a:t>Federal AAN — Book 04 HRIT Identity &amp; Org SSOT · CSI Team Draft — Internal · FedRAMP Moderate · Date Code 2026-07-07 11:03 ET</a:t>
+              <a:t>Federal AAN — Book 04 HRIT Identity &amp; Org SSOT · CSI Team Draft — Internal · FedRAMP Moderate · Date Code 2026-07-07 11:57 ET</a:t>
             </a:r>
             <a:endParaRPr lang="en-US" sz="800" dirty="0"/>
           </a:p>
@@ -28919,7 +30008,7 @@
                 <a:ea typeface="Arial" pitchFamily="34" charset="-122"/>
                 <a:cs typeface="Arial" pitchFamily="34" charset="-120"/>
               </a:rPr>
-              <a:t>Federal AAN — Book 04 HRIT Identity &amp; Org SSOT · CSI Team Draft — Internal · FedRAMP Moderate · Date Code 2026-07-07 11:03 ET</a:t>
+              <a:t>Federal AAN — Book 04 HRIT Identity &amp; Org SSOT · CSI Team Draft — Internal · FedRAMP Moderate · Date Code 2026-07-07 11:57 ET</a:t>
             </a:r>
             <a:endParaRPr lang="en-US" sz="800" dirty="0"/>
           </a:p>
@@ -29920,7 +31009,7 @@
                 <a:ea typeface="Arial" pitchFamily="34" charset="-122"/>
                 <a:cs typeface="Arial" pitchFamily="34" charset="-120"/>
               </a:rPr>
-              <a:t>Federal AAN — Book 04 HRIT Identity &amp; Org SSOT · CSI Team Draft — Internal · FedRAMP Moderate · Date Code 2026-07-07 11:03 ET</a:t>
+              <a:t>Federal AAN — Book 04 HRIT Identity &amp; Org SSOT · CSI Team Draft — Internal · FedRAMP Moderate · Date Code 2026-07-07 11:57 ET</a:t>
             </a:r>
             <a:endParaRPr lang="en-US" sz="800" dirty="0"/>
           </a:p>
@@ -31235,7 +32324,7 @@
                 <a:ea typeface="Arial" pitchFamily="34" charset="-122"/>
                 <a:cs typeface="Arial" pitchFamily="34" charset="-120"/>
               </a:rPr>
-              <a:t>Federal AAN — Book 04 HRIT Identity &amp; Org SSOT · CSI Team Draft — Internal · FedRAMP Moderate · Date Code 2026-07-07 11:03 ET</a:t>
+              <a:t>Federal AAN — Book 04 HRIT Identity &amp; Org SSOT · CSI Team Draft — Internal · FedRAMP Moderate · Date Code 2026-07-07 11:57 ET</a:t>
             </a:r>
             <a:endParaRPr lang="en-US" sz="800" dirty="0"/>
           </a:p>
